--- a/10 класс/urok2/Презентация_занятие2_ред2.pptx
+++ b/10 класс/urok2/Презентация_занятие2_ред2.pptx
@@ -2598,7 +2598,7 @@
             <a:r>
               <a:rPr lang="en-US" sz="2400" b="1" dirty="0">
                 <a:solidFill>
-                  <a:srgbClr val="8B7CF6"/>
+                  <a:schemeClr val="bg1"/>
                 </a:solidFill>
                 <a:latin typeface="Calibri" pitchFamily="34" charset="0"/>
                 <a:ea typeface="Calibri" pitchFamily="34" charset="-122"/>
@@ -2606,7 +2606,11 @@
               </a:rPr>
               <a:t>Словесный</a:t>
             </a:r>
-            <a:endParaRPr lang="en-US" sz="2400" dirty="0"/>
+            <a:endParaRPr lang="en-US" sz="2400" dirty="0">
+              <a:solidFill>
+                <a:schemeClr val="bg1"/>
+              </a:solidFill>
+            </a:endParaRPr>
           </a:p>
         </p:txBody>
       </p:sp>
@@ -2742,7 +2746,7 @@
             <a:r>
               <a:rPr lang="en-US" sz="2400" b="1" dirty="0">
                 <a:solidFill>
-                  <a:srgbClr val="4FD1E0"/>
+                  <a:schemeClr val="bg1"/>
                 </a:solidFill>
                 <a:latin typeface="Calibri" pitchFamily="34" charset="0"/>
                 <a:ea typeface="Calibri" pitchFamily="34" charset="-122"/>
@@ -2750,7 +2754,11 @@
               </a:rPr>
               <a:t>Псевдокод</a:t>
             </a:r>
-            <a:endParaRPr lang="en-US" sz="2400" dirty="0"/>
+            <a:endParaRPr lang="en-US" sz="2400" dirty="0">
+              <a:solidFill>
+                <a:schemeClr val="bg1"/>
+              </a:solidFill>
+            </a:endParaRPr>
           </a:p>
         </p:txBody>
       </p:sp>
@@ -2886,7 +2894,7 @@
             <a:r>
               <a:rPr lang="en-US" sz="2400" b="1" dirty="0">
                 <a:solidFill>
-                  <a:srgbClr val="3DD6A0"/>
+                  <a:schemeClr val="bg1"/>
                 </a:solidFill>
                 <a:latin typeface="Calibri" pitchFamily="34" charset="0"/>
                 <a:ea typeface="Calibri" pitchFamily="34" charset="-122"/>
@@ -2894,7 +2902,11 @@
               </a:rPr>
               <a:t>Блок-схема</a:t>
             </a:r>
-            <a:endParaRPr lang="en-US" sz="2400" dirty="0"/>
+            <a:endParaRPr lang="en-US" sz="2400" dirty="0">
+              <a:solidFill>
+                <a:schemeClr val="bg1"/>
+              </a:solidFill>
+            </a:endParaRPr>
           </a:p>
         </p:txBody>
       </p:sp>
@@ -3030,7 +3042,7 @@
             <a:r>
               <a:rPr lang="en-US" sz="2400" b="1" dirty="0">
                 <a:solidFill>
-                  <a:srgbClr val="F2789F"/>
+                  <a:schemeClr val="bg1"/>
                 </a:solidFill>
                 <a:latin typeface="Calibri" pitchFamily="34" charset="0"/>
                 <a:ea typeface="Calibri" pitchFamily="34" charset="-122"/>
@@ -3038,7 +3050,11 @@
               </a:rPr>
               <a:t>Код</a:t>
             </a:r>
-            <a:endParaRPr lang="en-US" sz="2400" dirty="0"/>
+            <a:endParaRPr lang="en-US" sz="2400" dirty="0">
+              <a:solidFill>
+                <a:schemeClr val="bg1"/>
+              </a:solidFill>
+            </a:endParaRPr>
           </a:p>
         </p:txBody>
       </p:sp>
@@ -3129,7 +3145,7 @@
         <p:spPr>
           <a:xfrm>
             <a:off x="640080" y="6172200"/>
-            <a:ext cx="10881360" cy="502920"/>
+            <a:ext cx="10881360" cy="685800"/>
           </a:xfrm>
           <a:prstGeom prst="roundRect">
             <a:avLst>
@@ -3156,23 +3172,23 @@
         <p:spPr>
           <a:xfrm>
             <a:off x="960120" y="6172200"/>
-            <a:ext cx="10241280" cy="502920"/>
-          </a:xfrm>
-          <a:prstGeom prst="rect">
-            <a:avLst/>
-          </a:prstGeom>
-          <a:noFill/>
-          <a:ln/>
-        </p:spPr>
-        <p:txBody>
-          <a:bodyPr wrap="square" lIns="0" tIns="0" rIns="0" bIns="0" rtlCol="0" anchor="ctr"/>
-          <a:lstStyle/>
-          <a:p>
-            <a:pPr marL="0" indent="0">
-              <a:buNone/>
-            </a:pPr>
-            <a:r>
-              <a:rPr lang="en-US" sz="2000" dirty="0">
+            <a:ext cx="10241280" cy="605118"/>
+          </a:xfrm>
+          <a:prstGeom prst="rect">
+            <a:avLst/>
+          </a:prstGeom>
+          <a:noFill/>
+          <a:ln/>
+        </p:spPr>
+        <p:txBody>
+          <a:bodyPr wrap="square" lIns="0" tIns="0" rIns="0" bIns="0" rtlCol="0" anchor="ctr"/>
+          <a:lstStyle/>
+          <a:p>
+            <a:pPr marL="0" indent="0">
+              <a:buNone/>
+            </a:pPr>
+            <a:r>
+              <a:rPr lang="en-US" sz="2000" b="1" dirty="0">
                 <a:solidFill>
                   <a:srgbClr val="FFFFFF"/>
                 </a:solidFill>
@@ -3182,7 +3198,7 @@
               </a:rPr>
               <a:t>Псевдокод — это черновик. Компьютер его не выполнит. Он нужен, чтобы не запутаться до того, как сядешь за компьютер.</a:t>
             </a:r>
-            <a:endParaRPr lang="en-US" sz="2000" dirty="0"/>
+            <a:endParaRPr lang="en-US" sz="2000" b="1" dirty="0"/>
           </a:p>
         </p:txBody>
       </p:sp>
@@ -3504,8 +3520,8 @@
         </p:nvSpPr>
         <p:spPr>
           <a:xfrm>
-            <a:off x="640080" y="1691640"/>
-            <a:ext cx="10881360" cy="1280160"/>
+            <a:off x="457199" y="1120588"/>
+            <a:ext cx="11519647" cy="1851212"/>
           </a:xfrm>
           <a:prstGeom prst="roundRect">
             <a:avLst>
@@ -3531,7 +3547,7 @@
         </p:nvSpPr>
         <p:spPr>
           <a:xfrm>
-            <a:off x="1005840" y="1828800"/>
+            <a:off x="914400" y="1600200"/>
             <a:ext cx="10149840" cy="1005840"/>
           </a:xfrm>
           <a:prstGeom prst="rect">
@@ -3548,7 +3564,7 @@
               <a:buNone/>
             </a:pPr>
             <a:r>
-              <a:rPr lang="en-US" sz="2400" dirty="0">
+              <a:rPr lang="en-US" sz="2800" b="1" dirty="0">
                 <a:solidFill>
                   <a:srgbClr val="FFFFFF"/>
                 </a:solidFill>
@@ -3558,7 +3574,7 @@
               </a:rPr>
               <a:t>Алгоритмический язык — язык для записи алгоритмов. У него строгие правила: каждая запись понимается единственным образом. Поэтому его понимает не только человек, но и машина.</a:t>
             </a:r>
-            <a:endParaRPr lang="en-US" sz="2400" dirty="0"/>
+            <a:endParaRPr lang="en-US" sz="2800" b="1" dirty="0"/>
           </a:p>
         </p:txBody>
       </p:sp>
@@ -3614,9 +3630,9 @@
               <a:buNone/>
             </a:pPr>
             <a:r>
-              <a:rPr lang="en-US" sz="1900" b="1" dirty="0">
-                <a:solidFill>
-                  <a:srgbClr val="F2789F"/>
+              <a:rPr lang="en-US" sz="2400" b="1" dirty="0">
+                <a:solidFill>
+                  <a:schemeClr val="bg1"/>
                 </a:solidFill>
                 <a:latin typeface="Calibri" pitchFamily="34" charset="0"/>
                 <a:ea typeface="Calibri" pitchFamily="34" charset="-122"/>
@@ -3624,7 +3640,11 @@
               </a:rPr>
               <a:t>Обычный язык</a:t>
             </a:r>
-            <a:endParaRPr lang="en-US" sz="1900" dirty="0"/>
+            <a:endParaRPr lang="en-US" sz="2400" dirty="0">
+              <a:solidFill>
+                <a:schemeClr val="bg1"/>
+              </a:solidFill>
+            </a:endParaRPr>
           </a:p>
         </p:txBody>
       </p:sp>
@@ -3759,9 +3779,9 @@
               <a:buNone/>
             </a:pPr>
             <a:r>
-              <a:rPr lang="en-US" sz="1900" b="1" dirty="0">
-                <a:solidFill>
-                  <a:srgbClr val="3DD6A0"/>
+              <a:rPr lang="en-US" sz="2000" b="1" dirty="0">
+                <a:solidFill>
+                  <a:schemeClr val="bg1"/>
                 </a:solidFill>
                 <a:latin typeface="Calibri" pitchFamily="34" charset="0"/>
                 <a:ea typeface="Calibri" pitchFamily="34" charset="-122"/>
@@ -3769,7 +3789,11 @@
               </a:rPr>
               <a:t>Алгоритмический язык</a:t>
             </a:r>
-            <a:endParaRPr lang="en-US" sz="1900" dirty="0"/>
+            <a:endParaRPr lang="en-US" sz="2000" dirty="0">
+              <a:solidFill>
+                <a:schemeClr val="bg1"/>
+              </a:solidFill>
+            </a:endParaRPr>
           </a:p>
         </p:txBody>
       </p:sp>
@@ -4132,7 +4156,7 @@
             <a:r>
               <a:rPr lang="en-US" sz="1600" dirty="0">
                 <a:solidFill>
-                  <a:srgbClr val="4FD1E0"/>
+                  <a:schemeClr val="bg1"/>
                 </a:solidFill>
                 <a:latin typeface="Consolas" pitchFamily="34" charset="0"/>
                 <a:ea typeface="Consolas" pitchFamily="34" charset="-122"/>
@@ -4140,7 +4164,11 @@
               </a:rPr>
               <a:t>dlina = 6</a:t>
             </a:r>
-            <a:endParaRPr lang="en-US" sz="1600" dirty="0"/>
+            <a:endParaRPr lang="en-US" sz="1600" dirty="0">
+              <a:solidFill>
+                <a:schemeClr val="bg1"/>
+              </a:solidFill>
+            </a:endParaRPr>
           </a:p>
           <a:p>
             <a:pPr marL="0" indent="0">
@@ -4152,7 +4180,7 @@
             <a:r>
               <a:rPr lang="en-US" sz="1600" dirty="0">
                 <a:solidFill>
-                  <a:srgbClr val="4FD1E0"/>
+                  <a:schemeClr val="bg1"/>
                 </a:solidFill>
                 <a:latin typeface="Consolas" pitchFamily="34" charset="0"/>
                 <a:ea typeface="Consolas" pitchFamily="34" charset="-122"/>
@@ -4160,7 +4188,11 @@
               </a:rPr>
               <a:t>shirina = 4</a:t>
             </a:r>
-            <a:endParaRPr lang="en-US" sz="1600" dirty="0"/>
+            <a:endParaRPr lang="en-US" sz="1600" dirty="0">
+              <a:solidFill>
+                <a:schemeClr val="bg1"/>
+              </a:solidFill>
+            </a:endParaRPr>
           </a:p>
           <a:p>
             <a:pPr marL="0" indent="0">
@@ -4169,7 +4201,11 @@
               </a:lnSpc>
               <a:buNone/>
             </a:pPr>
-            <a:endParaRPr lang="en-US" sz="1600" dirty="0"/>
+            <a:endParaRPr lang="en-US" sz="1600" dirty="0">
+              <a:solidFill>
+                <a:schemeClr val="bg1"/>
+              </a:solidFill>
+            </a:endParaRPr>
           </a:p>
           <a:p>
             <a:pPr marL="0" indent="0">
@@ -4181,7 +4217,7 @@
             <a:r>
               <a:rPr lang="en-US" sz="1600" dirty="0">
                 <a:solidFill>
-                  <a:srgbClr val="4FD1E0"/>
+                  <a:schemeClr val="bg1"/>
                 </a:solidFill>
                 <a:latin typeface="Consolas" pitchFamily="34" charset="0"/>
                 <a:ea typeface="Consolas" pitchFamily="34" charset="-122"/>
@@ -4189,7 +4225,11 @@
               </a:rPr>
               <a:t>perimetr = 2 * (dlina + shirina)</a:t>
             </a:r>
-            <a:endParaRPr lang="en-US" sz="1600" dirty="0"/>
+            <a:endParaRPr lang="en-US" sz="1600" dirty="0">
+              <a:solidFill>
+                <a:schemeClr val="bg1"/>
+              </a:solidFill>
+            </a:endParaRPr>
           </a:p>
           <a:p>
             <a:pPr marL="0" indent="0">
@@ -4201,7 +4241,7 @@
             <a:r>
               <a:rPr lang="en-US" sz="1600" dirty="0">
                 <a:solidFill>
-                  <a:srgbClr val="4FD1E0"/>
+                  <a:schemeClr val="bg1"/>
                 </a:solidFill>
                 <a:latin typeface="Consolas" pitchFamily="34" charset="0"/>
                 <a:ea typeface="Consolas" pitchFamily="34" charset="-122"/>
@@ -4209,7 +4249,11 @@
               </a:rPr>
               <a:t>ploshad = dlina * shirina</a:t>
             </a:r>
-            <a:endParaRPr lang="en-US" sz="1600" dirty="0"/>
+            <a:endParaRPr lang="en-US" sz="1600" dirty="0">
+              <a:solidFill>
+                <a:schemeClr val="bg1"/>
+              </a:solidFill>
+            </a:endParaRPr>
           </a:p>
           <a:p>
             <a:pPr marL="0" indent="0">
@@ -4218,7 +4262,11 @@
               </a:lnSpc>
               <a:buNone/>
             </a:pPr>
-            <a:endParaRPr lang="en-US" sz="1600" dirty="0"/>
+            <a:endParaRPr lang="en-US" sz="1600" dirty="0">
+              <a:solidFill>
+                <a:schemeClr val="bg1"/>
+              </a:solidFill>
+            </a:endParaRPr>
           </a:p>
           <a:p>
             <a:pPr marL="0" indent="0">
@@ -4230,7 +4278,7 @@
             <a:r>
               <a:rPr lang="en-US" sz="1600" dirty="0">
                 <a:solidFill>
-                  <a:srgbClr val="4FD1E0"/>
+                  <a:schemeClr val="bg1"/>
                 </a:solidFill>
                 <a:latin typeface="Consolas" pitchFamily="34" charset="0"/>
                 <a:ea typeface="Consolas" pitchFamily="34" charset="-122"/>
@@ -4238,7 +4286,11 @@
               </a:rPr>
               <a:t>print("Периметр:", perimetr)</a:t>
             </a:r>
-            <a:endParaRPr lang="en-US" sz="1600" dirty="0"/>
+            <a:endParaRPr lang="en-US" sz="1600" dirty="0">
+              <a:solidFill>
+                <a:schemeClr val="bg1"/>
+              </a:solidFill>
+            </a:endParaRPr>
           </a:p>
           <a:p>
             <a:pPr marL="0" indent="0">
@@ -4250,7 +4302,7 @@
             <a:r>
               <a:rPr lang="en-US" sz="1600" dirty="0">
                 <a:solidFill>
-                  <a:srgbClr val="4FD1E0"/>
+                  <a:schemeClr val="bg1"/>
                 </a:solidFill>
                 <a:latin typeface="Consolas" pitchFamily="34" charset="0"/>
                 <a:ea typeface="Consolas" pitchFamily="34" charset="-122"/>
@@ -4258,7 +4310,11 @@
               </a:rPr>
               <a:t>print("Площадь:", ploshad)</a:t>
             </a:r>
-            <a:endParaRPr lang="en-US" sz="1600" dirty="0"/>
+            <a:endParaRPr lang="en-US" sz="1600" dirty="0">
+              <a:solidFill>
+                <a:schemeClr val="bg1"/>
+              </a:solidFill>
+            </a:endParaRPr>
           </a:p>
         </p:txBody>
       </p:sp>
@@ -4316,7 +4372,7 @@
             <a:r>
               <a:rPr lang="en-US" sz="1700" b="1" dirty="0">
                 <a:solidFill>
-                  <a:srgbClr val="3DD6A0"/>
+                  <a:schemeClr val="bg1"/>
                 </a:solidFill>
                 <a:latin typeface="Calibri" pitchFamily="34" charset="0"/>
                 <a:ea typeface="Calibri" pitchFamily="34" charset="-122"/>
@@ -4324,7 +4380,11 @@
               </a:rPr>
               <a:t>Что выведет</a:t>
             </a:r>
-            <a:endParaRPr lang="en-US" sz="1700" dirty="0"/>
+            <a:endParaRPr lang="en-US" sz="1700" dirty="0">
+              <a:solidFill>
+                <a:schemeClr val="bg1"/>
+              </a:solidFill>
+            </a:endParaRPr>
           </a:p>
         </p:txBody>
       </p:sp>
@@ -4355,7 +4415,7 @@
             <a:r>
               <a:rPr lang="en-US" sz="1600" dirty="0">
                 <a:solidFill>
-                  <a:srgbClr val="4FD1E0"/>
+                  <a:schemeClr val="bg1"/>
                 </a:solidFill>
                 <a:latin typeface="Consolas" pitchFamily="34" charset="0"/>
                 <a:ea typeface="Consolas" pitchFamily="34" charset="-122"/>
@@ -4363,7 +4423,11 @@
               </a:rPr>
               <a:t>Периметр: 20</a:t>
             </a:r>
-            <a:endParaRPr lang="en-US" sz="1600" dirty="0"/>
+            <a:endParaRPr lang="en-US" sz="1600" dirty="0">
+              <a:solidFill>
+                <a:schemeClr val="bg1"/>
+              </a:solidFill>
+            </a:endParaRPr>
           </a:p>
           <a:p>
             <a:pPr marL="0" indent="0">
@@ -4372,7 +4436,7 @@
             <a:r>
               <a:rPr lang="en-US" sz="1600" dirty="0">
                 <a:solidFill>
-                  <a:srgbClr val="4FD1E0"/>
+                  <a:schemeClr val="bg1"/>
                 </a:solidFill>
                 <a:latin typeface="Consolas" pitchFamily="34" charset="0"/>
                 <a:ea typeface="Consolas" pitchFamily="34" charset="-122"/>
@@ -4380,7 +4444,11 @@
               </a:rPr>
               <a:t>Площадь: 24</a:t>
             </a:r>
-            <a:endParaRPr lang="en-US" sz="1600" dirty="0"/>
+            <a:endParaRPr lang="en-US" sz="1600" dirty="0">
+              <a:solidFill>
+                <a:schemeClr val="bg1"/>
+              </a:solidFill>
+            </a:endParaRPr>
           </a:p>
         </p:txBody>
       </p:sp>
@@ -4438,7 +4506,7 @@
             <a:r>
               <a:rPr lang="en-US" sz="1700" b="1" dirty="0">
                 <a:solidFill>
-                  <a:srgbClr val="8B7CF6"/>
+                  <a:schemeClr val="bg1"/>
                 </a:solidFill>
                 <a:latin typeface="Calibri" pitchFamily="34" charset="0"/>
                 <a:ea typeface="Calibri" pitchFamily="34" charset="-122"/>
@@ -4446,7 +4514,11 @@
               </a:rPr>
               <a:t>Сравните</a:t>
             </a:r>
-            <a:endParaRPr lang="en-US" sz="1700" dirty="0"/>
+            <a:endParaRPr lang="en-US" sz="1700" dirty="0">
+              <a:solidFill>
+                <a:schemeClr val="bg1"/>
+              </a:solidFill>
+            </a:endParaRPr>
           </a:p>
         </p:txBody>
       </p:sp>
@@ -4755,7 +4827,7 @@
               <a:buNone/>
             </a:pPr>
             <a:r>
-              <a:rPr lang="en-US" sz="1500" dirty="0">
+              <a:rPr lang="en-US" sz="2000" b="1" dirty="0">
                 <a:solidFill>
                   <a:srgbClr val="FFFFFF"/>
                 </a:solidFill>
@@ -4765,7 +4837,7 @@
               </a:rPr>
               <a:t>Начало</a:t>
             </a:r>
-            <a:endParaRPr lang="en-US" sz="1500" dirty="0"/>
+            <a:endParaRPr lang="en-US" sz="2000" b="1" dirty="0"/>
           </a:p>
         </p:txBody>
       </p:sp>
@@ -4843,7 +4915,7 @@
               <a:buNone/>
             </a:pPr>
             <a:r>
-              <a:rPr lang="en-US" sz="1500" dirty="0">
+              <a:rPr lang="en-US" sz="2000" b="1" dirty="0">
                 <a:solidFill>
                   <a:srgbClr val="FFFFFF"/>
                 </a:solidFill>
@@ -4853,7 +4925,7 @@
               </a:rPr>
               <a:t>Ввод числа n</a:t>
             </a:r>
-            <a:endParaRPr lang="en-US" sz="1500" dirty="0"/>
+            <a:endParaRPr lang="en-US" sz="2000" b="1" dirty="0"/>
           </a:p>
         </p:txBody>
       </p:sp>
@@ -4931,7 +5003,7 @@
               <a:buNone/>
             </a:pPr>
             <a:r>
-              <a:rPr lang="en-US" sz="1600" b="1" dirty="0">
+              <a:rPr lang="en-US" sz="2000" b="1" dirty="0">
                 <a:solidFill>
                   <a:srgbClr val="FFFFFF"/>
                 </a:solidFill>
@@ -4941,7 +5013,7 @@
               </a:rPr>
               <a:t>n &gt; 0 ?</a:t>
             </a:r>
-            <a:endParaRPr lang="en-US" sz="1600" dirty="0"/>
+            <a:endParaRPr lang="en-US" sz="2000" dirty="0"/>
           </a:p>
         </p:txBody>
       </p:sp>
@@ -5121,9 +5193,9 @@
               <a:buNone/>
             </a:pPr>
             <a:r>
-              <a:rPr lang="en-US" sz="1400" dirty="0">
-                <a:solidFill>
-                  <a:srgbClr val="FFFFFF"/>
+              <a:rPr lang="en-US" sz="2000" dirty="0">
+                <a:solidFill>
+                  <a:schemeClr val="bg1"/>
                 </a:solidFill>
                 <a:latin typeface="Calibri" pitchFamily="34" charset="0"/>
                 <a:ea typeface="Calibri" pitchFamily="34" charset="-122"/>
@@ -5131,7 +5203,11 @@
               </a:rPr>
               <a:t>Вывод «плюс»</a:t>
             </a:r>
-            <a:endParaRPr lang="en-US" sz="1400" dirty="0"/>
+            <a:endParaRPr lang="en-US" sz="2000" dirty="0">
+              <a:solidFill>
+                <a:schemeClr val="bg1"/>
+              </a:solidFill>
+            </a:endParaRPr>
           </a:p>
         </p:txBody>
       </p:sp>
@@ -5185,7 +5261,7 @@
               <a:buNone/>
             </a:pPr>
             <a:r>
-              <a:rPr lang="en-US" sz="1400" dirty="0">
+              <a:rPr lang="en-US" sz="2000" dirty="0">
                 <a:solidFill>
                   <a:srgbClr val="FFFFFF"/>
                 </a:solidFill>
@@ -5195,7 +5271,7 @@
               </a:rPr>
               <a:t>Вывод «минус»</a:t>
             </a:r>
-            <a:endParaRPr lang="en-US" sz="1400" dirty="0"/>
+            <a:endParaRPr lang="en-US" sz="2000" dirty="0"/>
           </a:p>
         </p:txBody>
       </p:sp>
@@ -5342,7 +5418,7 @@
               <a:buNone/>
             </a:pPr>
             <a:r>
-              <a:rPr lang="en-US" sz="1500" dirty="0">
+              <a:rPr lang="en-US" sz="2000" b="1" dirty="0">
                 <a:solidFill>
                   <a:srgbClr val="FFFFFF"/>
                 </a:solidFill>
@@ -5352,7 +5428,7 @@
               </a:rPr>
               <a:t>Конец</a:t>
             </a:r>
-            <a:endParaRPr lang="en-US" sz="1500" dirty="0"/>
+            <a:endParaRPr lang="en-US" sz="2000" b="1" dirty="0"/>
           </a:p>
         </p:txBody>
       </p:sp>
@@ -7867,7 +7943,7 @@
               <a:buNone/>
             </a:pPr>
             <a:r>
-              <a:rPr lang="en-US" sz="1700" b="1" dirty="0">
+              <a:rPr lang="en-US" sz="2400" b="1" dirty="0">
                 <a:solidFill>
                   <a:srgbClr val="FFFFFF"/>
                 </a:solidFill>
@@ -7877,7 +7953,7 @@
               </a:rPr>
               <a:t>Что такое алгоритм?</a:t>
             </a:r>
-            <a:endParaRPr lang="en-US" sz="1700" dirty="0"/>
+            <a:endParaRPr lang="en-US" sz="2400" b="1" dirty="0"/>
           </a:p>
         </p:txBody>
       </p:sp>
@@ -7972,7 +8048,7 @@
               <a:buNone/>
             </a:pPr>
             <a:r>
-              <a:rPr lang="en-US" sz="1700" b="1" dirty="0">
+              <a:rPr lang="en-US" sz="2400" b="1" dirty="0">
                 <a:solidFill>
                   <a:srgbClr val="FFFFFF"/>
                 </a:solidFill>
@@ -7982,7 +8058,7 @@
               </a:rPr>
               <a:t>Назовите свойства</a:t>
             </a:r>
-            <a:endParaRPr lang="en-US" sz="1700" dirty="0"/>
+            <a:endParaRPr lang="en-US" sz="2400" dirty="0"/>
           </a:p>
         </p:txBody>
       </p:sp>
@@ -8077,7 +8153,7 @@
               <a:buNone/>
             </a:pPr>
             <a:r>
-              <a:rPr lang="en-US" sz="1700" b="1" dirty="0">
+              <a:rPr lang="en-US" sz="2400" b="1" dirty="0">
                 <a:solidFill>
                   <a:srgbClr val="FFFFFF"/>
                 </a:solidFill>
@@ -8087,7 +8163,7 @@
               </a:rPr>
               <a:t>«Возьми немного риса»</a:t>
             </a:r>
-            <a:endParaRPr lang="en-US" sz="1700" dirty="0"/>
+            <a:endParaRPr lang="en-US" sz="2400" dirty="0"/>
           </a:p>
         </p:txBody>
       </p:sp>
@@ -8182,7 +8258,7 @@
               <a:buNone/>
             </a:pPr>
             <a:r>
-              <a:rPr lang="en-US" sz="1700" b="1" dirty="0">
+              <a:rPr lang="en-US" sz="2400" b="1" dirty="0">
                 <a:solidFill>
                   <a:srgbClr val="FFFFFF"/>
                 </a:solidFill>
@@ -8192,7 +8268,7 @@
               </a:rPr>
               <a:t>«Раздели 20 на 4»</a:t>
             </a:r>
-            <a:endParaRPr lang="en-US" sz="1700" dirty="0"/>
+            <a:endParaRPr lang="en-US" sz="2400" dirty="0"/>
           </a:p>
         </p:txBody>
       </p:sp>
@@ -8287,7 +8363,7 @@
               <a:buNone/>
             </a:pPr>
             <a:r>
-              <a:rPr lang="en-US" sz="1700" b="1" dirty="0">
+              <a:rPr lang="en-US" sz="2400" b="1" dirty="0">
                 <a:solidFill>
                   <a:srgbClr val="FFFFFF"/>
                 </a:solidFill>
@@ -8297,7 +8373,7 @@
               </a:rPr>
               <a:t>Свой пример алгоритма</a:t>
             </a:r>
-            <a:endParaRPr lang="en-US" sz="1700" dirty="0"/>
+            <a:endParaRPr lang="en-US" sz="2400" dirty="0"/>
           </a:p>
         </p:txBody>
       </p:sp>
@@ -8532,7 +8608,7 @@
             <a:r>
               <a:rPr lang="en-US" sz="2400" b="1" dirty="0">
                 <a:solidFill>
-                  <a:srgbClr val="8B7CF6"/>
+                  <a:schemeClr val="bg1"/>
                 </a:solidFill>
                 <a:latin typeface="Calibri" pitchFamily="34" charset="0"/>
                 <a:ea typeface="Calibri" pitchFamily="34" charset="-122"/>
@@ -8540,7 +8616,11 @@
               </a:rPr>
               <a:t>ЗАДАЧА</a:t>
             </a:r>
-            <a:endParaRPr lang="en-US" sz="2400" dirty="0"/>
+            <a:endParaRPr lang="en-US" sz="2400" dirty="0">
+              <a:solidFill>
+                <a:schemeClr val="bg1"/>
+              </a:solidFill>
+            </a:endParaRPr>
           </a:p>
         </p:txBody>
       </p:sp>
@@ -8661,7 +8741,7 @@
             <a:r>
               <a:rPr lang="en-US" sz="2400" b="1" dirty="0">
                 <a:solidFill>
-                  <a:srgbClr val="4FD1E0"/>
+                  <a:schemeClr val="bg1"/>
                 </a:solidFill>
                 <a:latin typeface="Calibri" pitchFamily="34" charset="0"/>
                 <a:ea typeface="Calibri" pitchFamily="34" charset="-122"/>
@@ -8669,7 +8749,11 @@
               </a:rPr>
               <a:t>АЛГОРИТМ</a:t>
             </a:r>
-            <a:endParaRPr lang="en-US" sz="2400" dirty="0"/>
+            <a:endParaRPr lang="en-US" sz="2400" dirty="0">
+              <a:solidFill>
+                <a:schemeClr val="bg1"/>
+              </a:solidFill>
+            </a:endParaRPr>
           </a:p>
         </p:txBody>
       </p:sp>
@@ -8790,7 +8874,7 @@
             <a:r>
               <a:rPr lang="en-US" sz="2400" b="1" dirty="0">
                 <a:solidFill>
-                  <a:srgbClr val="3DD6A0"/>
+                  <a:schemeClr val="bg1"/>
                 </a:solidFill>
                 <a:latin typeface="Calibri" pitchFamily="34" charset="0"/>
                 <a:ea typeface="Calibri" pitchFamily="34" charset="-122"/>
@@ -8798,7 +8882,11 @@
               </a:rPr>
               <a:t>ПРОГРАММА</a:t>
             </a:r>
-            <a:endParaRPr lang="en-US" sz="2400" dirty="0"/>
+            <a:endParaRPr lang="en-US" sz="2400" dirty="0">
+              <a:solidFill>
+                <a:schemeClr val="bg1"/>
+              </a:solidFill>
+            </a:endParaRPr>
           </a:p>
         </p:txBody>
       </p:sp>
@@ -8919,7 +9007,7 @@
             <a:r>
               <a:rPr lang="en-US" sz="2400" b="1" dirty="0">
                 <a:solidFill>
-                  <a:srgbClr val="F2789F"/>
+                  <a:schemeClr val="bg1"/>
                 </a:solidFill>
                 <a:latin typeface="Calibri" pitchFamily="34" charset="0"/>
                 <a:ea typeface="Calibri" pitchFamily="34" charset="-122"/>
@@ -8927,7 +9015,11 @@
               </a:rPr>
               <a:t>ПРОВЕРКА</a:t>
             </a:r>
-            <a:endParaRPr lang="en-US" sz="2400" dirty="0"/>
+            <a:endParaRPr lang="en-US" sz="2400" dirty="0">
+              <a:solidFill>
+                <a:schemeClr val="bg1"/>
+              </a:solidFill>
+            </a:endParaRPr>
           </a:p>
         </p:txBody>
       </p:sp>
@@ -9284,9 +9376,9 @@
               <a:buNone/>
             </a:pPr>
             <a:r>
-              <a:rPr lang="en-US" sz="2200" b="1" dirty="0">
-                <a:solidFill>
-                  <a:srgbClr val="8B7CF6"/>
+              <a:rPr lang="en-US" sz="2400" b="1" dirty="0">
+                <a:solidFill>
+                  <a:schemeClr val="bg1"/>
                 </a:solidFill>
                 <a:latin typeface="Calibri" pitchFamily="34" charset="0"/>
                 <a:ea typeface="Calibri" pitchFamily="34" charset="-122"/>
@@ -9294,7 +9386,11 @@
               </a:rPr>
               <a:t>Словесный</a:t>
             </a:r>
-            <a:endParaRPr lang="en-US" sz="2200" dirty="0"/>
+            <a:endParaRPr lang="en-US" sz="2400" dirty="0">
+              <a:solidFill>
+                <a:schemeClr val="bg1"/>
+              </a:solidFill>
+            </a:endParaRPr>
           </a:p>
         </p:txBody>
       </p:sp>
@@ -9323,7 +9419,7 @@
               <a:buNone/>
             </a:pPr>
             <a:r>
-              <a:rPr lang="en-US" sz="1500" dirty="0">
+              <a:rPr lang="en-US" sz="2000" dirty="0">
                 <a:solidFill>
                   <a:srgbClr val="FFFFFF"/>
                 </a:solidFill>
@@ -9333,7 +9429,7 @@
               </a:rPr>
               <a:t>Обычным языком, предложениями</a:t>
             </a:r>
-            <a:endParaRPr lang="en-US" sz="1500" dirty="0"/>
+            <a:endParaRPr lang="en-US" sz="2000" dirty="0"/>
           </a:p>
         </p:txBody>
       </p:sp>
@@ -9362,9 +9458,9 @@
               <a:buNone/>
             </a:pPr>
             <a:r>
-              <a:rPr lang="en-US" sz="1400" dirty="0">
-                <a:solidFill>
-                  <a:srgbClr val="A9A3C4"/>
+              <a:rPr lang="en-US" sz="2000" b="1" dirty="0">
+                <a:solidFill>
+                  <a:schemeClr val="bg1"/>
                 </a:solidFill>
                 <a:latin typeface="Calibri" pitchFamily="34" charset="0"/>
                 <a:ea typeface="Calibri" pitchFamily="34" charset="-122"/>
@@ -9372,7 +9468,11 @@
               </a:rPr>
               <a:t>Объяснить человеку. Беда: допускает двоякое толкование</a:t>
             </a:r>
-            <a:endParaRPr lang="en-US" sz="1400" dirty="0"/>
+            <a:endParaRPr lang="en-US" sz="2000" b="1" dirty="0">
+              <a:solidFill>
+                <a:schemeClr val="bg1"/>
+              </a:solidFill>
+            </a:endParaRPr>
           </a:p>
         </p:txBody>
       </p:sp>
@@ -9435,9 +9535,9 @@
               <a:buNone/>
             </a:pPr>
             <a:r>
-              <a:rPr lang="en-US" sz="2200" b="1" dirty="0">
-                <a:solidFill>
-                  <a:srgbClr val="4FD1E0"/>
+              <a:rPr lang="en-US" sz="2400" b="1" dirty="0">
+                <a:solidFill>
+                  <a:schemeClr val="bg1"/>
                 </a:solidFill>
                 <a:latin typeface="Calibri" pitchFamily="34" charset="0"/>
                 <a:ea typeface="Calibri" pitchFamily="34" charset="-122"/>
@@ -9445,7 +9545,11 @@
               </a:rPr>
               <a:t>Псевдокод</a:t>
             </a:r>
-            <a:endParaRPr lang="en-US" sz="2200" dirty="0"/>
+            <a:endParaRPr lang="en-US" sz="2400" dirty="0">
+              <a:solidFill>
+                <a:schemeClr val="bg1"/>
+              </a:solidFill>
+            </a:endParaRPr>
           </a:p>
         </p:txBody>
       </p:sp>
@@ -9474,7 +9578,7 @@
               <a:buNone/>
             </a:pPr>
             <a:r>
-              <a:rPr lang="en-US" sz="1500" dirty="0">
+              <a:rPr lang="en-US" sz="2000" dirty="0">
                 <a:solidFill>
                   <a:srgbClr val="FFFFFF"/>
                 </a:solidFill>
@@ -9484,7 +9588,7 @@
               </a:rPr>
               <a:t>Кратко, по образцу языка программирования</a:t>
             </a:r>
-            <a:endParaRPr lang="en-US" sz="1500" dirty="0"/>
+            <a:endParaRPr lang="en-US" sz="2000" dirty="0"/>
           </a:p>
         </p:txBody>
       </p:sp>
@@ -9513,9 +9617,9 @@
               <a:buNone/>
             </a:pPr>
             <a:r>
-              <a:rPr lang="en-US" sz="1400" dirty="0">
-                <a:solidFill>
-                  <a:srgbClr val="A9A3C4"/>
+              <a:rPr lang="en-US" sz="2000" dirty="0">
+                <a:solidFill>
+                  <a:schemeClr val="bg1"/>
                 </a:solidFill>
                 <a:latin typeface="Calibri" pitchFamily="34" charset="0"/>
                 <a:ea typeface="Calibri" pitchFamily="34" charset="-122"/>
@@ -9523,7 +9627,11 @@
               </a:rPr>
               <a:t>Обдумать решение до написания программы</a:t>
             </a:r>
-            <a:endParaRPr lang="en-US" sz="1400" dirty="0"/>
+            <a:endParaRPr lang="en-US" sz="2000" dirty="0">
+              <a:solidFill>
+                <a:schemeClr val="bg1"/>
+              </a:solidFill>
+            </a:endParaRPr>
           </a:p>
         </p:txBody>
       </p:sp>
@@ -9586,9 +9694,9 @@
               <a:buNone/>
             </a:pPr>
             <a:r>
-              <a:rPr lang="en-US" sz="2200" b="1" dirty="0">
-                <a:solidFill>
-                  <a:srgbClr val="3DD6A0"/>
+              <a:rPr lang="en-US" sz="2400" b="1" dirty="0">
+                <a:solidFill>
+                  <a:schemeClr val="bg1"/>
                 </a:solidFill>
                 <a:latin typeface="Calibri" pitchFamily="34" charset="0"/>
                 <a:ea typeface="Calibri" pitchFamily="34" charset="-122"/>
@@ -9596,7 +9704,11 @@
               </a:rPr>
               <a:t>Блок-схема</a:t>
             </a:r>
-            <a:endParaRPr lang="en-US" sz="2200" dirty="0"/>
+            <a:endParaRPr lang="en-US" sz="2400" dirty="0">
+              <a:solidFill>
+                <a:schemeClr val="bg1"/>
+              </a:solidFill>
+            </a:endParaRPr>
           </a:p>
         </p:txBody>
       </p:sp>
@@ -9625,7 +9737,7 @@
               <a:buNone/>
             </a:pPr>
             <a:r>
-              <a:rPr lang="en-US" sz="1500" dirty="0">
+              <a:rPr lang="en-US" sz="2000" dirty="0">
                 <a:solidFill>
                   <a:srgbClr val="FFFFFF"/>
                 </a:solidFill>
@@ -9635,7 +9747,7 @@
               </a:rPr>
               <a:t>Графически, условными обозначениями</a:t>
             </a:r>
-            <a:endParaRPr lang="en-US" sz="1500" dirty="0"/>
+            <a:endParaRPr lang="en-US" sz="2000" dirty="0"/>
           </a:p>
         </p:txBody>
       </p:sp>
@@ -9664,9 +9776,9 @@
               <a:buNone/>
             </a:pPr>
             <a:r>
-              <a:rPr lang="en-US" sz="1400" dirty="0">
-                <a:solidFill>
-                  <a:srgbClr val="A9A3C4"/>
+              <a:rPr lang="en-US" sz="2000" dirty="0">
+                <a:solidFill>
+                  <a:schemeClr val="bg1"/>
                 </a:solidFill>
                 <a:latin typeface="Calibri" pitchFamily="34" charset="0"/>
                 <a:ea typeface="Calibri" pitchFamily="34" charset="-122"/>
@@ -9674,7 +9786,11 @@
               </a:rPr>
               <a:t>Проверить логику: виден весь путь сразу</a:t>
             </a:r>
-            <a:endParaRPr lang="en-US" sz="1400" dirty="0"/>
+            <a:endParaRPr lang="en-US" sz="2000" dirty="0">
+              <a:solidFill>
+                <a:schemeClr val="bg1"/>
+              </a:solidFill>
+            </a:endParaRPr>
           </a:p>
         </p:txBody>
       </p:sp>
@@ -10197,7 +10313,7 @@
             <a:r>
               <a:rPr lang="en-US" sz="2400" b="1" dirty="0">
                 <a:solidFill>
-                  <a:srgbClr val="8B7CF6"/>
+                  <a:schemeClr val="bg1"/>
                 </a:solidFill>
                 <a:latin typeface="Calibri" pitchFamily="34" charset="0"/>
                 <a:ea typeface="Calibri" pitchFamily="34" charset="-122"/>
@@ -10205,7 +10321,11 @@
               </a:rPr>
               <a:t>Овал</a:t>
             </a:r>
-            <a:endParaRPr lang="en-US" sz="2400" dirty="0"/>
+            <a:endParaRPr lang="en-US" sz="2400" dirty="0">
+              <a:solidFill>
+                <a:schemeClr val="bg1"/>
+              </a:solidFill>
+            </a:endParaRPr>
           </a:p>
         </p:txBody>
       </p:sp>
@@ -10275,7 +10395,7 @@
             <a:r>
               <a:rPr lang="en-US" sz="2000" b="1" dirty="0">
                 <a:solidFill>
-                  <a:srgbClr val="A9A3C4"/>
+                  <a:schemeClr val="bg1"/>
                 </a:solidFill>
                 <a:latin typeface="Calibri" pitchFamily="34" charset="0"/>
                 <a:ea typeface="Calibri" pitchFamily="34" charset="-122"/>
@@ -10283,7 +10403,11 @@
               </a:rPr>
               <a:t>Ровно одно начало; концов может быть несколько</a:t>
             </a:r>
-            <a:endParaRPr lang="en-US" sz="2000" b="1" dirty="0"/>
+            <a:endParaRPr lang="en-US" sz="2000" b="1" dirty="0">
+              <a:solidFill>
+                <a:schemeClr val="bg1"/>
+              </a:solidFill>
+            </a:endParaRPr>
           </a:p>
         </p:txBody>
       </p:sp>
@@ -10341,7 +10465,7 @@
             <a:r>
               <a:rPr lang="en-US" sz="2400" b="1" dirty="0">
                 <a:solidFill>
-                  <a:srgbClr val="4FD1E0"/>
+                  <a:schemeClr val="bg1"/>
                 </a:solidFill>
                 <a:latin typeface="Calibri" pitchFamily="34" charset="0"/>
                 <a:ea typeface="Calibri" pitchFamily="34" charset="-122"/>
@@ -10349,7 +10473,11 @@
               </a:rPr>
               <a:t>Параллелограмм</a:t>
             </a:r>
-            <a:endParaRPr lang="en-US" sz="2400" dirty="0"/>
+            <a:endParaRPr lang="en-US" sz="2400" dirty="0">
+              <a:solidFill>
+                <a:schemeClr val="bg1"/>
+              </a:solidFill>
+            </a:endParaRPr>
           </a:p>
         </p:txBody>
       </p:sp>
@@ -10419,7 +10547,7 @@
             <a:r>
               <a:rPr lang="en-US" sz="2000" b="1" dirty="0">
                 <a:solidFill>
-                  <a:srgbClr val="A9A3C4"/>
+                  <a:schemeClr val="bg1"/>
                 </a:solidFill>
                 <a:latin typeface="Calibri" pitchFamily="34" charset="0"/>
                 <a:ea typeface="Calibri" pitchFamily="34" charset="-122"/>
@@ -10427,7 +10555,11 @@
               </a:rPr>
               <a:t>Указывается, какая величина вводится или выводится</a:t>
             </a:r>
-            <a:endParaRPr lang="en-US" sz="2000" b="1" dirty="0"/>
+            <a:endParaRPr lang="en-US" sz="2000" b="1" dirty="0">
+              <a:solidFill>
+                <a:schemeClr val="bg1"/>
+              </a:solidFill>
+            </a:endParaRPr>
           </a:p>
         </p:txBody>
       </p:sp>
@@ -10485,7 +10617,7 @@
             <a:r>
               <a:rPr lang="en-US" sz="2400" b="1" dirty="0">
                 <a:solidFill>
-                  <a:srgbClr val="3DD6A0"/>
+                  <a:schemeClr val="bg1"/>
                 </a:solidFill>
                 <a:latin typeface="Calibri" pitchFamily="34" charset="0"/>
                 <a:ea typeface="Calibri" pitchFamily="34" charset="-122"/>
@@ -10493,7 +10625,11 @@
               </a:rPr>
               <a:t>Прямоугольник</a:t>
             </a:r>
-            <a:endParaRPr lang="en-US" sz="2400" dirty="0"/>
+            <a:endParaRPr lang="en-US" sz="2400" dirty="0">
+              <a:solidFill>
+                <a:schemeClr val="bg1"/>
+              </a:solidFill>
+            </a:endParaRPr>
           </a:p>
         </p:txBody>
       </p:sp>
@@ -10563,7 +10699,7 @@
             <a:r>
               <a:rPr lang="en-US" sz="2400" dirty="0">
                 <a:solidFill>
-                  <a:srgbClr val="A9A3C4"/>
+                  <a:schemeClr val="bg1"/>
                 </a:solidFill>
                 <a:latin typeface="Calibri" pitchFamily="34" charset="0"/>
                 <a:ea typeface="Calibri" pitchFamily="34" charset="-122"/>
@@ -10571,7 +10707,11 @@
               </a:rPr>
               <a:t>Один вход, один выход</a:t>
             </a:r>
-            <a:endParaRPr lang="en-US" sz="2400" dirty="0"/>
+            <a:endParaRPr lang="en-US" sz="2400" dirty="0">
+              <a:solidFill>
+                <a:schemeClr val="bg1"/>
+              </a:solidFill>
+            </a:endParaRPr>
           </a:p>
         </p:txBody>
       </p:sp>
@@ -10629,7 +10769,7 @@
             <a:r>
               <a:rPr lang="en-US" sz="2400" b="1" dirty="0">
                 <a:solidFill>
-                  <a:srgbClr val="F2789F"/>
+                  <a:schemeClr val="bg1"/>
                 </a:solidFill>
                 <a:latin typeface="Calibri" pitchFamily="34" charset="0"/>
                 <a:ea typeface="Calibri" pitchFamily="34" charset="-122"/>
@@ -10637,7 +10777,11 @@
               </a:rPr>
               <a:t>Ромб</a:t>
             </a:r>
-            <a:endParaRPr lang="en-US" sz="2400" dirty="0"/>
+            <a:endParaRPr lang="en-US" sz="2400" dirty="0">
+              <a:solidFill>
+                <a:schemeClr val="bg1"/>
+              </a:solidFill>
+            </a:endParaRPr>
           </a:p>
         </p:txBody>
       </p:sp>
@@ -10707,7 +10851,7 @@
             <a:r>
               <a:rPr lang="en-US" sz="2400" dirty="0">
                 <a:solidFill>
-                  <a:srgbClr val="A9A3C4"/>
+                  <a:schemeClr val="bg1"/>
                 </a:solidFill>
                 <a:latin typeface="Calibri" pitchFamily="34" charset="0"/>
                 <a:ea typeface="Calibri" pitchFamily="34" charset="-122"/>
@@ -10715,7 +10859,11 @@
               </a:rPr>
               <a:t>Один вход, ДВА выхода; оба подписываются «да» и «нет»</a:t>
             </a:r>
-            <a:endParaRPr lang="en-US" sz="2400" dirty="0"/>
+            <a:endParaRPr lang="en-US" sz="2400" dirty="0">
+              <a:solidFill>
+                <a:schemeClr val="bg1"/>
+              </a:solidFill>
+            </a:endParaRPr>
           </a:p>
         </p:txBody>
       </p:sp>
@@ -11287,7 +11435,7 @@
             <a:r>
               <a:rPr lang="en-US" sz="1700" b="1" dirty="0">
                 <a:solidFill>
-                  <a:srgbClr val="8B7CF6"/>
+                  <a:schemeClr val="bg1"/>
                 </a:solidFill>
                 <a:latin typeface="Calibri" pitchFamily="34" charset="0"/>
                 <a:ea typeface="Calibri" pitchFamily="34" charset="-122"/>
@@ -11295,7 +11443,11 @@
               </a:rPr>
               <a:t>Словесная запись</a:t>
             </a:r>
-            <a:endParaRPr lang="en-US" sz="1700" dirty="0"/>
+            <a:endParaRPr lang="en-US" sz="1700" dirty="0">
+              <a:solidFill>
+                <a:schemeClr val="bg1"/>
+              </a:solidFill>
+            </a:endParaRPr>
           </a:p>
         </p:txBody>
       </p:sp>
@@ -11363,9 +11515,9 @@
               <a:buNone/>
             </a:pPr>
             <a:r>
-              <a:rPr lang="en-US" sz="1700" b="1" dirty="0">
-                <a:solidFill>
-                  <a:srgbClr val="4FD1E0"/>
+              <a:rPr lang="en-US" sz="2000" b="1" dirty="0">
+                <a:solidFill>
+                  <a:schemeClr val="bg1"/>
                 </a:solidFill>
                 <a:latin typeface="Calibri" pitchFamily="34" charset="0"/>
                 <a:ea typeface="Calibri" pitchFamily="34" charset="-122"/>
@@ -11373,7 +11525,11 @@
               </a:rPr>
               <a:t>Псевдокод</a:t>
             </a:r>
-            <a:endParaRPr lang="en-US" sz="1700" dirty="0"/>
+            <a:endParaRPr lang="en-US" sz="2000" dirty="0">
+              <a:solidFill>
+                <a:schemeClr val="bg1"/>
+              </a:solidFill>
+            </a:endParaRPr>
           </a:p>
         </p:txBody>
       </p:sp>
@@ -11434,7 +11590,7 @@
             <a:r>
               <a:rPr lang="en-US" sz="2000" b="1" dirty="0">
                 <a:solidFill>
-                  <a:srgbClr val="4FD1E0"/>
+                  <a:schemeClr val="bg1"/>
                 </a:solidFill>
                 <a:latin typeface="Consolas" pitchFamily="34" charset="0"/>
                 <a:ea typeface="Consolas" pitchFamily="34" charset="-122"/>
@@ -11442,7 +11598,11 @@
               </a:rPr>
               <a:t>начало</a:t>
             </a:r>
-            <a:endParaRPr lang="en-US" sz="2000" b="1" dirty="0"/>
+            <a:endParaRPr lang="en-US" sz="2000" b="1" dirty="0">
+              <a:solidFill>
+                <a:schemeClr val="bg1"/>
+              </a:solidFill>
+            </a:endParaRPr>
           </a:p>
           <a:p>
             <a:pPr marL="0" indent="0">
@@ -11454,7 +11614,7 @@
             <a:r>
               <a:rPr lang="en-US" sz="2000" b="1" dirty="0">
                 <a:solidFill>
-                  <a:srgbClr val="4FD1E0"/>
+                  <a:schemeClr val="bg1"/>
                 </a:solidFill>
                 <a:latin typeface="Consolas" pitchFamily="34" charset="0"/>
                 <a:ea typeface="Consolas" pitchFamily="34" charset="-122"/>
@@ -11462,7 +11622,11 @@
               </a:rPr>
               <a:t>  дано: длина, ширина</a:t>
             </a:r>
-            <a:endParaRPr lang="en-US" sz="2000" b="1" dirty="0"/>
+            <a:endParaRPr lang="en-US" sz="2000" b="1" dirty="0">
+              <a:solidFill>
+                <a:schemeClr val="bg1"/>
+              </a:solidFill>
+            </a:endParaRPr>
           </a:p>
           <a:p>
             <a:pPr marL="0" indent="0">
@@ -11474,7 +11638,7 @@
             <a:r>
               <a:rPr lang="en-US" sz="2000" b="1" dirty="0">
                 <a:solidFill>
-                  <a:srgbClr val="4FD1E0"/>
+                  <a:schemeClr val="bg1"/>
                 </a:solidFill>
                 <a:latin typeface="Consolas" pitchFamily="34" charset="0"/>
                 <a:ea typeface="Consolas" pitchFamily="34" charset="-122"/>
@@ -11482,7 +11646,11 @@
               </a:rPr>
               <a:t>  периметр = 2 * (длина + ширина)</a:t>
             </a:r>
-            <a:endParaRPr lang="en-US" sz="2000" b="1" dirty="0"/>
+            <a:endParaRPr lang="en-US" sz="2000" b="1" dirty="0">
+              <a:solidFill>
+                <a:schemeClr val="bg1"/>
+              </a:solidFill>
+            </a:endParaRPr>
           </a:p>
           <a:p>
             <a:pPr marL="0" indent="0">
@@ -11494,7 +11662,7 @@
             <a:r>
               <a:rPr lang="en-US" sz="2000" b="1" dirty="0">
                 <a:solidFill>
-                  <a:srgbClr val="4FD1E0"/>
+                  <a:schemeClr val="bg1"/>
                 </a:solidFill>
                 <a:latin typeface="Consolas" pitchFamily="34" charset="0"/>
                 <a:ea typeface="Consolas" pitchFamily="34" charset="-122"/>
@@ -11502,7 +11670,11 @@
               </a:rPr>
               <a:t>  площадь  = длина * ширина</a:t>
             </a:r>
-            <a:endParaRPr lang="en-US" sz="2000" b="1" dirty="0"/>
+            <a:endParaRPr lang="en-US" sz="2000" b="1" dirty="0">
+              <a:solidFill>
+                <a:schemeClr val="bg1"/>
+              </a:solidFill>
+            </a:endParaRPr>
           </a:p>
           <a:p>
             <a:pPr marL="0" indent="0">
@@ -11514,7 +11686,7 @@
             <a:r>
               <a:rPr lang="en-US" sz="2000" b="1" dirty="0">
                 <a:solidFill>
-                  <a:srgbClr val="4FD1E0"/>
+                  <a:schemeClr val="bg1"/>
                 </a:solidFill>
                 <a:latin typeface="Consolas" pitchFamily="34" charset="0"/>
                 <a:ea typeface="Consolas" pitchFamily="34" charset="-122"/>
@@ -11522,7 +11694,11 @@
               </a:rPr>
               <a:t>  вывести периметр, площадь</a:t>
             </a:r>
-            <a:endParaRPr lang="en-US" sz="2000" b="1" dirty="0"/>
+            <a:endParaRPr lang="en-US" sz="2000" b="1" dirty="0">
+              <a:solidFill>
+                <a:schemeClr val="bg1"/>
+              </a:solidFill>
+            </a:endParaRPr>
           </a:p>
           <a:p>
             <a:pPr marL="0" indent="0">
@@ -11534,7 +11710,7 @@
             <a:r>
               <a:rPr lang="en-US" sz="2000" b="1" dirty="0">
                 <a:solidFill>
-                  <a:srgbClr val="4FD1E0"/>
+                  <a:schemeClr val="bg1"/>
                 </a:solidFill>
                 <a:latin typeface="Consolas" pitchFamily="34" charset="0"/>
                 <a:ea typeface="Consolas" pitchFamily="34" charset="-122"/>
@@ -11542,7 +11718,11 @@
               </a:rPr>
               <a:t>конец</a:t>
             </a:r>
-            <a:endParaRPr lang="en-US" sz="2000" b="1" dirty="0"/>
+            <a:endParaRPr lang="en-US" sz="2000" b="1" dirty="0">
+              <a:solidFill>
+                <a:schemeClr val="bg1"/>
+              </a:solidFill>
+            </a:endParaRPr>
           </a:p>
         </p:txBody>
       </p:sp>
@@ -11598,9 +11778,9 @@
               <a:buNone/>
             </a:pPr>
             <a:r>
-              <a:rPr lang="en-US" sz="1700" b="1" dirty="0">
-                <a:solidFill>
-                  <a:srgbClr val="3DD6A0"/>
+              <a:rPr lang="en-US" sz="2000" b="1" dirty="0">
+                <a:solidFill>
+                  <a:schemeClr val="bg1"/>
                 </a:solidFill>
                 <a:latin typeface="Calibri" pitchFamily="34" charset="0"/>
                 <a:ea typeface="Calibri" pitchFamily="34" charset="-122"/>
@@ -11608,7 +11788,11 @@
               </a:rPr>
               <a:t>Блок-схема</a:t>
             </a:r>
-            <a:endParaRPr lang="en-US" sz="1700" dirty="0"/>
+            <a:endParaRPr lang="en-US" sz="2000" dirty="0">
+              <a:solidFill>
+                <a:schemeClr val="bg1"/>
+              </a:solidFill>
+            </a:endParaRPr>
           </a:p>
         </p:txBody>
       </p:sp>
